--- a/ゲーム科1年/00_前期/ゲームプログラミングⅢ/ゲーム数学/座学/08_円の衝突判定.pptx
+++ b/ゲーム科1年/00_前期/ゲームプログラミングⅢ/ゲーム数学/座学/08_円の衝突判定.pptx
@@ -272,7 +272,7 @@
           <a:p>
             <a:fld id="{E9CC885B-4903-4D54-9A93-00025F12DED9}" type="datetimeFigureOut">
               <a:rPr kumimoji="1" lang="ja-JP" altLang="en-US" smtClean="0"/>
-              <a:t>2024/10/4</a:t>
+              <a:t>2025/6/24</a:t>
             </a:fld>
             <a:endParaRPr kumimoji="1" lang="ja-JP" altLang="en-US"/>
           </a:p>
@@ -502,7 +502,7 @@
           <a:p>
             <a:fld id="{E9CC885B-4903-4D54-9A93-00025F12DED9}" type="datetimeFigureOut">
               <a:rPr kumimoji="1" lang="ja-JP" altLang="en-US" smtClean="0"/>
-              <a:t>2024/10/4</a:t>
+              <a:t>2025/6/24</a:t>
             </a:fld>
             <a:endParaRPr kumimoji="1" lang="ja-JP" altLang="en-US"/>
           </a:p>
@@ -742,7 +742,7 @@
           <a:p>
             <a:fld id="{E9CC885B-4903-4D54-9A93-00025F12DED9}" type="datetimeFigureOut">
               <a:rPr kumimoji="1" lang="ja-JP" altLang="en-US" smtClean="0"/>
-              <a:t>2024/10/4</a:t>
+              <a:t>2025/6/24</a:t>
             </a:fld>
             <a:endParaRPr kumimoji="1" lang="ja-JP" altLang="en-US"/>
           </a:p>
@@ -972,7 +972,7 @@
           <a:p>
             <a:fld id="{E9CC885B-4903-4D54-9A93-00025F12DED9}" type="datetimeFigureOut">
               <a:rPr kumimoji="1" lang="ja-JP" altLang="en-US" smtClean="0"/>
-              <a:t>2024/10/4</a:t>
+              <a:t>2025/6/24</a:t>
             </a:fld>
             <a:endParaRPr kumimoji="1" lang="ja-JP" altLang="en-US"/>
           </a:p>
@@ -1247,7 +1247,7 @@
           <a:p>
             <a:fld id="{E9CC885B-4903-4D54-9A93-00025F12DED9}" type="datetimeFigureOut">
               <a:rPr kumimoji="1" lang="ja-JP" altLang="en-US" smtClean="0"/>
-              <a:t>2024/10/4</a:t>
+              <a:t>2025/6/24</a:t>
             </a:fld>
             <a:endParaRPr kumimoji="1" lang="ja-JP" altLang="en-US"/>
           </a:p>
@@ -1576,7 +1576,7 @@
           <a:p>
             <a:fld id="{E9CC885B-4903-4D54-9A93-00025F12DED9}" type="datetimeFigureOut">
               <a:rPr kumimoji="1" lang="ja-JP" altLang="en-US" smtClean="0"/>
-              <a:t>2024/10/4</a:t>
+              <a:t>2025/6/24</a:t>
             </a:fld>
             <a:endParaRPr kumimoji="1" lang="ja-JP" altLang="en-US"/>
           </a:p>
@@ -2052,7 +2052,7 @@
           <a:p>
             <a:fld id="{E9CC885B-4903-4D54-9A93-00025F12DED9}" type="datetimeFigureOut">
               <a:rPr kumimoji="1" lang="ja-JP" altLang="en-US" smtClean="0"/>
-              <a:t>2024/10/4</a:t>
+              <a:t>2025/6/24</a:t>
             </a:fld>
             <a:endParaRPr kumimoji="1" lang="ja-JP" altLang="en-US"/>
           </a:p>
@@ -2193,7 +2193,7 @@
           <a:p>
             <a:fld id="{E9CC885B-4903-4D54-9A93-00025F12DED9}" type="datetimeFigureOut">
               <a:rPr kumimoji="1" lang="ja-JP" altLang="en-US" smtClean="0"/>
-              <a:t>2024/10/4</a:t>
+              <a:t>2025/6/24</a:t>
             </a:fld>
             <a:endParaRPr kumimoji="1" lang="ja-JP" altLang="en-US"/>
           </a:p>
@@ -2306,7 +2306,7 @@
           <a:p>
             <a:fld id="{E9CC885B-4903-4D54-9A93-00025F12DED9}" type="datetimeFigureOut">
               <a:rPr kumimoji="1" lang="ja-JP" altLang="en-US" smtClean="0"/>
-              <a:t>2024/10/4</a:t>
+              <a:t>2025/6/24</a:t>
             </a:fld>
             <a:endParaRPr kumimoji="1" lang="ja-JP" altLang="en-US"/>
           </a:p>
@@ -2649,7 +2649,7 @@
           <a:p>
             <a:fld id="{E9CC885B-4903-4D54-9A93-00025F12DED9}" type="datetimeFigureOut">
               <a:rPr kumimoji="1" lang="ja-JP" altLang="en-US" smtClean="0"/>
-              <a:t>2024/10/4</a:t>
+              <a:t>2025/6/24</a:t>
             </a:fld>
             <a:endParaRPr kumimoji="1" lang="ja-JP" altLang="en-US"/>
           </a:p>
@@ -2937,7 +2937,7 @@
           <a:p>
             <a:fld id="{E9CC885B-4903-4D54-9A93-00025F12DED9}" type="datetimeFigureOut">
               <a:rPr kumimoji="1" lang="ja-JP" altLang="en-US" smtClean="0"/>
-              <a:t>2024/10/4</a:t>
+              <a:t>2025/6/24</a:t>
             </a:fld>
             <a:endParaRPr kumimoji="1" lang="ja-JP" altLang="en-US"/>
           </a:p>
@@ -3210,7 +3210,7 @@
           <a:p>
             <a:fld id="{E9CC885B-4903-4D54-9A93-00025F12DED9}" type="datetimeFigureOut">
               <a:rPr kumimoji="1" lang="ja-JP" altLang="en-US" smtClean="0"/>
-              <a:t>2024/10/4</a:t>
+              <a:t>2025/6/24</a:t>
             </a:fld>
             <a:endParaRPr kumimoji="1" lang="ja-JP" altLang="en-US"/>
           </a:p>
@@ -3895,8 +3895,8 @@
           </a:p>
         </p:txBody>
       </p:sp>
-      <mc:AlternateContent xmlns:mc="http://schemas.openxmlformats.org/markup-compatibility/2006">
-        <mc:Choice xmlns:a14="http://schemas.microsoft.com/office/drawing/2010/main" Requires="a14">
+      <mc:AlternateContent xmlns:mc="http://schemas.openxmlformats.org/markup-compatibility/2006" xmlns:a14="http://schemas.microsoft.com/office/drawing/2010/main">
+        <mc:Choice Requires="a14">
           <p:sp>
             <p:nvSpPr>
               <p:cNvPr id="6" name="テキスト ボックス 5">
@@ -4119,19 +4119,7 @@
                       <a:rPr lang="en-US" altLang="ja-JP" sz="2400" i="1">
                         <a:latin typeface="Cambria Math" panose="02040503050406030204" pitchFamily="18" charset="0"/>
                       </a:rPr>
-                      <m:t>3600</m:t>
-                    </m:r>
-                    <m:r>
-                      <a:rPr lang="en-US" altLang="ja-JP" sz="2400" i="1">
-                        <a:latin typeface="Cambria Math" panose="02040503050406030204" pitchFamily="18" charset="0"/>
-                      </a:rPr>
-                      <m:t>+</m:t>
-                    </m:r>
-                    <m:r>
-                      <a:rPr lang="en-US" altLang="ja-JP" sz="2400" i="1">
-                        <a:latin typeface="Cambria Math" panose="02040503050406030204" pitchFamily="18" charset="0"/>
-                      </a:rPr>
-                      <m:t>100</m:t>
+                      <m:t>3600+100</m:t>
                     </m:r>
                     <m:r>
                       <a:rPr lang="en-US" altLang="ja-JP" sz="2400" b="0" i="1" smtClean="0">
@@ -4149,7 +4137,7 @@
             </p:txBody>
           </p:sp>
         </mc:Choice>
-        <mc:Fallback>
+        <mc:Fallback xmlns="">
           <p:sp>
             <p:nvSpPr>
               <p:cNvPr id="6" name="テキスト ボックス 5">
@@ -4260,8 +4248,8 @@
           </a:p>
         </p:txBody>
       </p:sp>
-      <mc:AlternateContent xmlns:mc="http://schemas.openxmlformats.org/markup-compatibility/2006">
-        <mc:Choice xmlns:a14="http://schemas.microsoft.com/office/drawing/2010/main" Requires="a14">
+      <mc:AlternateContent xmlns:mc="http://schemas.openxmlformats.org/markup-compatibility/2006" xmlns:a14="http://schemas.microsoft.com/office/drawing/2010/main">
+        <mc:Choice Requires="a14">
           <p:sp>
             <p:nvSpPr>
               <p:cNvPr id="6" name="テキスト ボックス 5">
@@ -4899,7 +4887,7 @@
             </p:txBody>
           </p:sp>
         </mc:Choice>
-        <mc:Fallback>
+        <mc:Fallback xmlns="">
           <p:sp>
             <p:nvSpPr>
               <p:cNvPr id="6" name="テキスト ボックス 5">
@@ -4976,6 +4964,60 @@
       </p:grpSpPr>
       <p:sp>
         <p:nvSpPr>
+          <p:cNvPr id="2" name="四角形: 角を丸くする 1">
+            <a:extLst>
+              <a:ext uri="{FF2B5EF4-FFF2-40B4-BE49-F238E27FC236}">
+                <a16:creationId xmlns:a16="http://schemas.microsoft.com/office/drawing/2014/main" id="{066EBE70-4541-4A38-9B7C-CEDD5CCC3B65}"/>
+              </a:ext>
+            </a:extLst>
+          </p:cNvPr>
+          <p:cNvSpPr/>
+          <p:nvPr/>
+        </p:nvSpPr>
+        <p:spPr>
+          <a:xfrm>
+            <a:off x="389466" y="1811866"/>
+            <a:ext cx="10622410" cy="1617133"/>
+          </a:xfrm>
+          <a:prstGeom prst="roundRect">
+            <a:avLst/>
+          </a:prstGeom>
+          <a:solidFill>
+            <a:schemeClr val="bg1">
+              <a:lumMod val="85000"/>
+            </a:schemeClr>
+          </a:solidFill>
+          <a:ln>
+            <a:noFill/>
+          </a:ln>
+        </p:spPr>
+        <p:style>
+          <a:lnRef idx="2">
+            <a:schemeClr val="accent1">
+              <a:shade val="50000"/>
+            </a:schemeClr>
+          </a:lnRef>
+          <a:fillRef idx="1">
+            <a:schemeClr val="accent1"/>
+          </a:fillRef>
+          <a:effectRef idx="0">
+            <a:schemeClr val="accent1"/>
+          </a:effectRef>
+          <a:fontRef idx="minor">
+            <a:schemeClr val="lt1"/>
+          </a:fontRef>
+        </p:style>
+        <p:txBody>
+          <a:bodyPr rtlCol="0" anchor="ctr"/>
+          <a:lstStyle/>
+          <a:p>
+            <a:pPr algn="ctr"/>
+            <a:endParaRPr kumimoji="1" lang="ja-JP" altLang="en-US"/>
+          </a:p>
+        </p:txBody>
+      </p:sp>
+      <p:sp>
+        <p:nvSpPr>
           <p:cNvPr id="4" name="テキスト ボックス 3">
             <a:extLst>
               <a:ext uri="{FF2B5EF4-FFF2-40B4-BE49-F238E27FC236}">
@@ -5010,8 +5052,8 @@
           </a:p>
         </p:txBody>
       </p:sp>
-      <mc:AlternateContent xmlns:mc="http://schemas.openxmlformats.org/markup-compatibility/2006">
-        <mc:Choice xmlns:a14="http://schemas.microsoft.com/office/drawing/2010/main" Requires="a14">
+      <mc:AlternateContent xmlns:mc="http://schemas.openxmlformats.org/markup-compatibility/2006" xmlns:a14="http://schemas.microsoft.com/office/drawing/2010/main">
+        <mc:Choice Requires="a14">
           <p:sp>
             <p:nvSpPr>
               <p:cNvPr id="6" name="テキスト ボックス 5">
@@ -5800,7 +5842,7 @@
             </p:txBody>
           </p:sp>
         </mc:Choice>
-        <mc:Fallback>
+        <mc:Fallback xmlns="">
           <p:sp>
             <p:nvSpPr>
               <p:cNvPr id="6" name="テキスト ボックス 5">
@@ -6073,13 +6115,7 @@
                       <a:rPr lang="en-US" altLang="ja-JP" sz="2400" b="0" i="1" smtClean="0">
                         <a:latin typeface="Cambria Math" panose="02040503050406030204" pitchFamily="18" charset="0"/>
                       </a:rPr>
-                      <m:t>=</m:t>
-                    </m:r>
-                    <m:r>
-                      <a:rPr lang="en-US" altLang="ja-JP" sz="2400" b="0" i="1" smtClean="0">
-                        <a:latin typeface="Cambria Math" panose="02040503050406030204" pitchFamily="18" charset="0"/>
-                      </a:rPr>
-                      <m:t>1600</m:t>
+                      <m:t>=1600</m:t>
                     </m:r>
                   </m:oMath>
                 </a14:m>
@@ -6125,13 +6161,7 @@
                           <a:rPr kumimoji="1" lang="en-US" altLang="ja-JP" sz="2400" b="0" i="1" smtClean="0">
                             <a:latin typeface="Cambria Math" panose="02040503050406030204" pitchFamily="18" charset="0"/>
                           </a:rPr>
-                          <m:t>−50</m:t>
-                        </m:r>
-                        <m:r>
-                          <a:rPr kumimoji="1" lang="en-US" altLang="ja-JP" sz="2400" b="0" i="1" smtClean="0">
-                            <a:latin typeface="Cambria Math" panose="02040503050406030204" pitchFamily="18" charset="0"/>
-                          </a:rPr>
-                          <m:t>)</m:t>
+                          <m:t>−50)</m:t>
                         </m:r>
                       </m:e>
                       <m:sup>
@@ -6180,7 +6210,7 @@
                           <a:rPr lang="en-US" altLang="ja-JP" sz="2400" b="0" i="1" smtClean="0">
                             <a:latin typeface="Cambria Math" panose="02040503050406030204" pitchFamily="18" charset="0"/>
                           </a:rPr>
-                          <m:t>600</m:t>
+                          <m:t>60</m:t>
                         </m:r>
                         <m:r>
                           <a:rPr lang="en-US" altLang="ja-JP" sz="2400" i="1">
@@ -6202,13 +6232,7 @@
                       <a:rPr lang="en-US" altLang="ja-JP" sz="2400" b="0" i="1" smtClean="0">
                         <a:latin typeface="Cambria Math" panose="02040503050406030204" pitchFamily="18" charset="0"/>
                       </a:rPr>
-                      <m:t>=</m:t>
-                    </m:r>
-                    <m:r>
-                      <a:rPr lang="en-US" altLang="ja-JP" sz="2400" b="0" i="1" smtClean="0">
-                        <a:latin typeface="Cambria Math" panose="02040503050406030204" pitchFamily="18" charset="0"/>
-                      </a:rPr>
-                      <m:t>256</m:t>
+                      <m:t>=256</m:t>
                     </m:r>
                   </m:oMath>
                 </a14:m>
@@ -6328,8 +6352,8 @@
           </a:p>
         </p:txBody>
       </p:sp>
-      <mc:AlternateContent xmlns:mc="http://schemas.openxmlformats.org/markup-compatibility/2006">
-        <mc:Choice xmlns:a14="http://schemas.microsoft.com/office/drawing/2010/main" Requires="a14">
+      <mc:AlternateContent xmlns:mc="http://schemas.openxmlformats.org/markup-compatibility/2006" xmlns:a14="http://schemas.microsoft.com/office/drawing/2010/main">
+        <mc:Choice Requires="a14">
           <p:sp>
             <p:nvSpPr>
               <p:cNvPr id="6" name="テキスト ボックス 5">
@@ -7366,7 +7390,7 @@
             </p:txBody>
           </p:sp>
         </mc:Choice>
-        <mc:Fallback>
+        <mc:Fallback xmlns="">
           <p:sp>
             <p:nvSpPr>
               <p:cNvPr id="6" name="テキスト ボックス 5">
@@ -11115,6 +11139,60 @@
       </p:grpSpPr>
       <p:sp>
         <p:nvSpPr>
+          <p:cNvPr id="2" name="四角形: 角を丸くする 1">
+            <a:extLst>
+              <a:ext uri="{FF2B5EF4-FFF2-40B4-BE49-F238E27FC236}">
+                <a16:creationId xmlns:a16="http://schemas.microsoft.com/office/drawing/2014/main" id="{4D9ED975-6208-4977-AB18-405C4895FE13}"/>
+              </a:ext>
+            </a:extLst>
+          </p:cNvPr>
+          <p:cNvSpPr/>
+          <p:nvPr/>
+        </p:nvSpPr>
+        <p:spPr>
+          <a:xfrm>
+            <a:off x="347133" y="1794933"/>
+            <a:ext cx="10583334" cy="3124200"/>
+          </a:xfrm>
+          <a:prstGeom prst="roundRect">
+            <a:avLst/>
+          </a:prstGeom>
+          <a:solidFill>
+            <a:schemeClr val="bg1">
+              <a:lumMod val="85000"/>
+            </a:schemeClr>
+          </a:solidFill>
+          <a:ln>
+            <a:noFill/>
+          </a:ln>
+        </p:spPr>
+        <p:style>
+          <a:lnRef idx="2">
+            <a:schemeClr val="accent1">
+              <a:shade val="50000"/>
+            </a:schemeClr>
+          </a:lnRef>
+          <a:fillRef idx="1">
+            <a:schemeClr val="accent1"/>
+          </a:fillRef>
+          <a:effectRef idx="0">
+            <a:schemeClr val="accent1"/>
+          </a:effectRef>
+          <a:fontRef idx="minor">
+            <a:schemeClr val="lt1"/>
+          </a:fontRef>
+        </p:style>
+        <p:txBody>
+          <a:bodyPr rtlCol="0" anchor="ctr"/>
+          <a:lstStyle/>
+          <a:p>
+            <a:pPr algn="ctr"/>
+            <a:endParaRPr kumimoji="1" lang="ja-JP" altLang="en-US"/>
+          </a:p>
+        </p:txBody>
+      </p:sp>
+      <p:sp>
+        <p:nvSpPr>
           <p:cNvPr id="4" name="テキスト ボックス 3">
             <a:extLst>
               <a:ext uri="{FF2B5EF4-FFF2-40B4-BE49-F238E27FC236}">

--- a/ゲーム科1年/00_前期/ゲームプログラミングⅢ/ゲーム数学/座学/08_円の衝突判定.pptx
+++ b/ゲーム科1年/00_前期/ゲームプログラミングⅢ/ゲーム数学/座学/08_円の衝突判定.pptx
@@ -272,7 +272,7 @@
           <a:p>
             <a:fld id="{E9CC885B-4903-4D54-9A93-00025F12DED9}" type="datetimeFigureOut">
               <a:rPr kumimoji="1" lang="ja-JP" altLang="en-US" smtClean="0"/>
-              <a:t>2025/6/24</a:t>
+              <a:t>2026/5/19</a:t>
             </a:fld>
             <a:endParaRPr kumimoji="1" lang="ja-JP" altLang="en-US"/>
           </a:p>
@@ -502,7 +502,7 @@
           <a:p>
             <a:fld id="{E9CC885B-4903-4D54-9A93-00025F12DED9}" type="datetimeFigureOut">
               <a:rPr kumimoji="1" lang="ja-JP" altLang="en-US" smtClean="0"/>
-              <a:t>2025/6/24</a:t>
+              <a:t>2026/5/19</a:t>
             </a:fld>
             <a:endParaRPr kumimoji="1" lang="ja-JP" altLang="en-US"/>
           </a:p>
@@ -742,7 +742,7 @@
           <a:p>
             <a:fld id="{E9CC885B-4903-4D54-9A93-00025F12DED9}" type="datetimeFigureOut">
               <a:rPr kumimoji="1" lang="ja-JP" altLang="en-US" smtClean="0"/>
-              <a:t>2025/6/24</a:t>
+              <a:t>2026/5/19</a:t>
             </a:fld>
             <a:endParaRPr kumimoji="1" lang="ja-JP" altLang="en-US"/>
           </a:p>
@@ -972,7 +972,7 @@
           <a:p>
             <a:fld id="{E9CC885B-4903-4D54-9A93-00025F12DED9}" type="datetimeFigureOut">
               <a:rPr kumimoji="1" lang="ja-JP" altLang="en-US" smtClean="0"/>
-              <a:t>2025/6/24</a:t>
+              <a:t>2026/5/19</a:t>
             </a:fld>
             <a:endParaRPr kumimoji="1" lang="ja-JP" altLang="en-US"/>
           </a:p>
@@ -1247,7 +1247,7 @@
           <a:p>
             <a:fld id="{E9CC885B-4903-4D54-9A93-00025F12DED9}" type="datetimeFigureOut">
               <a:rPr kumimoji="1" lang="ja-JP" altLang="en-US" smtClean="0"/>
-              <a:t>2025/6/24</a:t>
+              <a:t>2026/5/19</a:t>
             </a:fld>
             <a:endParaRPr kumimoji="1" lang="ja-JP" altLang="en-US"/>
           </a:p>
@@ -1576,7 +1576,7 @@
           <a:p>
             <a:fld id="{E9CC885B-4903-4D54-9A93-00025F12DED9}" type="datetimeFigureOut">
               <a:rPr kumimoji="1" lang="ja-JP" altLang="en-US" smtClean="0"/>
-              <a:t>2025/6/24</a:t>
+              <a:t>2026/5/19</a:t>
             </a:fld>
             <a:endParaRPr kumimoji="1" lang="ja-JP" altLang="en-US"/>
           </a:p>
@@ -2052,7 +2052,7 @@
           <a:p>
             <a:fld id="{E9CC885B-4903-4D54-9A93-00025F12DED9}" type="datetimeFigureOut">
               <a:rPr kumimoji="1" lang="ja-JP" altLang="en-US" smtClean="0"/>
-              <a:t>2025/6/24</a:t>
+              <a:t>2026/5/19</a:t>
             </a:fld>
             <a:endParaRPr kumimoji="1" lang="ja-JP" altLang="en-US"/>
           </a:p>
@@ -2193,7 +2193,7 @@
           <a:p>
             <a:fld id="{E9CC885B-4903-4D54-9A93-00025F12DED9}" type="datetimeFigureOut">
               <a:rPr kumimoji="1" lang="ja-JP" altLang="en-US" smtClean="0"/>
-              <a:t>2025/6/24</a:t>
+              <a:t>2026/5/19</a:t>
             </a:fld>
             <a:endParaRPr kumimoji="1" lang="ja-JP" altLang="en-US"/>
           </a:p>
@@ -2306,7 +2306,7 @@
           <a:p>
             <a:fld id="{E9CC885B-4903-4D54-9A93-00025F12DED9}" type="datetimeFigureOut">
               <a:rPr kumimoji="1" lang="ja-JP" altLang="en-US" smtClean="0"/>
-              <a:t>2025/6/24</a:t>
+              <a:t>2026/5/19</a:t>
             </a:fld>
             <a:endParaRPr kumimoji="1" lang="ja-JP" altLang="en-US"/>
           </a:p>
@@ -2649,7 +2649,7 @@
           <a:p>
             <a:fld id="{E9CC885B-4903-4D54-9A93-00025F12DED9}" type="datetimeFigureOut">
               <a:rPr kumimoji="1" lang="ja-JP" altLang="en-US" smtClean="0"/>
-              <a:t>2025/6/24</a:t>
+              <a:t>2026/5/19</a:t>
             </a:fld>
             <a:endParaRPr kumimoji="1" lang="ja-JP" altLang="en-US"/>
           </a:p>
@@ -2937,7 +2937,7 @@
           <a:p>
             <a:fld id="{E9CC885B-4903-4D54-9A93-00025F12DED9}" type="datetimeFigureOut">
               <a:rPr kumimoji="1" lang="ja-JP" altLang="en-US" smtClean="0"/>
-              <a:t>2025/6/24</a:t>
+              <a:t>2026/5/19</a:t>
             </a:fld>
             <a:endParaRPr kumimoji="1" lang="ja-JP" altLang="en-US"/>
           </a:p>
@@ -3210,7 +3210,7 @@
           <a:p>
             <a:fld id="{E9CC885B-4903-4D54-9A93-00025F12DED9}" type="datetimeFigureOut">
               <a:rPr kumimoji="1" lang="ja-JP" altLang="en-US" smtClean="0"/>
-              <a:t>2025/6/24</a:t>
+              <a:t>2026/5/19</a:t>
             </a:fld>
             <a:endParaRPr kumimoji="1" lang="ja-JP" altLang="en-US"/>
           </a:p>
@@ -5953,8 +5953,8 @@
           </a:p>
         </p:txBody>
       </p:sp>
-      <mc:AlternateContent xmlns:mc="http://schemas.openxmlformats.org/markup-compatibility/2006">
-        <mc:Choice xmlns:a14="http://schemas.microsoft.com/office/drawing/2010/main" Requires="a14">
+      <mc:AlternateContent xmlns:mc="http://schemas.openxmlformats.org/markup-compatibility/2006" xmlns:a14="http://schemas.microsoft.com/office/drawing/2010/main">
+        <mc:Choice Requires="a14">
           <p:sp>
             <p:nvSpPr>
               <p:cNvPr id="6" name="テキスト ボックス 5">
@@ -6241,7 +6241,7 @@
             </p:txBody>
           </p:sp>
         </mc:Choice>
-        <mc:Fallback>
+        <mc:Fallback xmlns="">
           <p:sp>
             <p:nvSpPr>
               <p:cNvPr id="6" name="テキスト ボックス 5">
@@ -6316,6 +6316,60 @@
           <a:chExt cx="0" cy="0"/>
         </a:xfrm>
       </p:grpSpPr>
+      <p:sp>
+        <p:nvSpPr>
+          <p:cNvPr id="5" name="四角形: 角を丸くする 4">
+            <a:extLst>
+              <a:ext uri="{FF2B5EF4-FFF2-40B4-BE49-F238E27FC236}">
+                <a16:creationId xmlns:a16="http://schemas.microsoft.com/office/drawing/2014/main" id="{836CA4D6-F7E4-4F27-9816-95BAC5B28F9A}"/>
+              </a:ext>
+            </a:extLst>
+          </p:cNvPr>
+          <p:cNvSpPr/>
+          <p:nvPr/>
+        </p:nvSpPr>
+        <p:spPr>
+          <a:xfrm>
+            <a:off x="389466" y="1811866"/>
+            <a:ext cx="10622410" cy="2350929"/>
+          </a:xfrm>
+          <a:prstGeom prst="roundRect">
+            <a:avLst/>
+          </a:prstGeom>
+          <a:solidFill>
+            <a:schemeClr val="bg1">
+              <a:lumMod val="85000"/>
+            </a:schemeClr>
+          </a:solidFill>
+          <a:ln>
+            <a:noFill/>
+          </a:ln>
+        </p:spPr>
+        <p:style>
+          <a:lnRef idx="2">
+            <a:schemeClr val="accent1">
+              <a:shade val="50000"/>
+            </a:schemeClr>
+          </a:lnRef>
+          <a:fillRef idx="1">
+            <a:schemeClr val="accent1"/>
+          </a:fillRef>
+          <a:effectRef idx="0">
+            <a:schemeClr val="accent1"/>
+          </a:effectRef>
+          <a:fontRef idx="minor">
+            <a:schemeClr val="lt1"/>
+          </a:fontRef>
+        </p:style>
+        <p:txBody>
+          <a:bodyPr rtlCol="0" anchor="ctr"/>
+          <a:lstStyle/>
+          <a:p>
+            <a:pPr algn="ctr"/>
+            <a:endParaRPr kumimoji="1" lang="ja-JP" altLang="en-US"/>
+          </a:p>
+        </p:txBody>
+      </p:sp>
       <p:sp>
         <p:nvSpPr>
           <p:cNvPr id="4" name="テキスト ボックス 3">
